--- a/estandarizacion/piramide-testing.pptx
+++ b/estandarizacion/piramide-testing.pptx
@@ -4362,7 +4362,7 @@
         <p:spPr>
           <a:xfrm>
             <a:off x="2554834" y="3145536"/>
-            <a:ext cx="3668572" cy="256032"/>
+            <a:ext cx="3668572" cy="276999"/>
           </a:xfrm>
           <a:prstGeom prst="rect">
             <a:avLst/>
@@ -4377,13 +4377,26 @@
           <a:p>
             <a:pPr algn="ctr"/>
             <a:r>
-              <a:rPr sz="1200" b="1" i="0">
+              <a:rPr sz="1200" b="1" i="0" dirty="0">
                 <a:solidFill>
                   <a:srgbClr val="FFFFAA"/>
                 </a:solidFill>
               </a:rPr>
               <a:t>Regression  ·  Accessibility  ·  Security</a:t>
             </a:r>
+            <a:r>
+              <a:rPr lang="es-CL" sz="1200" b="1" dirty="0">
+                <a:solidFill>
+                  <a:srgbClr val="FFFFAA"/>
+                </a:solidFill>
+              </a:rPr>
+              <a:t> ·  Smoke</a:t>
+            </a:r>
+            <a:endParaRPr sz="1200" b="1" i="0" dirty="0">
+              <a:solidFill>
+                <a:srgbClr val="FFFFAA"/>
+              </a:solidFill>
+            </a:endParaRPr>
           </a:p>
         </p:txBody>
       </p:sp>
@@ -4523,7 +4536,7 @@
           <a:p>
             <a:pPr algn="ctr"/>
             <a:r>
-              <a:rPr sz="1200" b="0" i="0">
+              <a:rPr sz="1200" b="0" i="0" dirty="0">
                 <a:solidFill>
                   <a:srgbClr val="FFFFFF"/>
                 </a:solidFill>
@@ -4542,7 +4555,7 @@
         <p:spPr>
           <a:xfrm>
             <a:off x="1734617" y="4425696"/>
-            <a:ext cx="5309006" cy="256032"/>
+            <a:ext cx="5309006" cy="276999"/>
           </a:xfrm>
           <a:prstGeom prst="rect">
             <a:avLst/>
@@ -4557,12 +4570,12 @@
           <a:p>
             <a:pPr algn="ctr"/>
             <a:r>
-              <a:rPr sz="1200" b="1" i="0">
+              <a:rPr sz="1200" b="1" i="0" dirty="0">
                 <a:solidFill>
                   <a:srgbClr val="FFFFAA"/>
                 </a:solidFill>
               </a:rPr>
-              <a:t>Integration  ·  Performance  ·  Smoke</a:t>
+              <a:t>Integration  ·  Performance </a:t>
             </a:r>
           </a:p>
         </p:txBody>
@@ -4771,12 +4784,28 @@
           <a:p>
             <a:pPr algn="ctr"/>
             <a:r>
-              <a:rPr sz="1200" b="1" i="0">
+              <a:rPr sz="1200" b="1" i="0" dirty="0">
                 <a:solidFill>
                   <a:srgbClr val="7FFFD4"/>
                 </a:solidFill>
               </a:rPr>
-              <a:t>[ DEV · UAT · PROD ]</a:t>
+              <a:t>[ DE</a:t>
+            </a:r>
+            <a:r>
+              <a:rPr lang="es-CL" sz="1200" b="1" i="0" dirty="0">
+                <a:solidFill>
+                  <a:srgbClr val="7FFFD4"/>
+                </a:solidFill>
+              </a:rPr>
+              <a:t>V</a:t>
+            </a:r>
+            <a:r>
+              <a:rPr sz="1200" b="1" i="0" dirty="0">
+                <a:solidFill>
+                  <a:srgbClr val="7FFFD4"/>
+                </a:solidFill>
+              </a:rPr>
+              <a:t>]</a:t>
             </a:r>
           </a:p>
         </p:txBody>
@@ -5663,7 +5692,7 @@
         </p:nvSpPr>
         <p:spPr>
           <a:xfrm>
-            <a:off x="9193378" y="3694176"/>
+            <a:off x="8912657" y="3694176"/>
             <a:ext cx="1005840" cy="292608"/>
           </a:xfrm>
           <a:prstGeom prst="rect">
@@ -5709,7 +5738,7 @@
         </p:nvSpPr>
         <p:spPr>
           <a:xfrm>
-            <a:off x="9296247" y="3694176"/>
+            <a:off x="9097832" y="3703874"/>
             <a:ext cx="731520" cy="276999"/>
           </a:xfrm>
           <a:prstGeom prst="rect">
@@ -6121,7 +6150,7 @@
         </p:nvSpPr>
         <p:spPr>
           <a:xfrm>
-            <a:off x="9152062" y="5166360"/>
+            <a:off x="10110978" y="3691583"/>
             <a:ext cx="731520" cy="292608"/>
           </a:xfrm>
           <a:prstGeom prst="rect">
@@ -6167,7 +6196,7 @@
         </p:nvSpPr>
         <p:spPr>
           <a:xfrm>
-            <a:off x="9232490" y="5184648"/>
+            <a:off x="10179888" y="3697777"/>
             <a:ext cx="731520" cy="292608"/>
           </a:xfrm>
           <a:prstGeom prst="rect">
@@ -10180,13 +10209,82 @@
           <a:p>
             <a:pPr algn="l"/>
             <a:r>
-              <a:rPr sz="2400" b="1" i="0">
+              <a:rPr sz="2400" b="1" i="0" dirty="0">
                 <a:solidFill>
                   <a:srgbClr val="0F2137"/>
                 </a:solidFill>
               </a:rPr>
-              <a:t>Mapa Completo — 11 Tipos en la Pirámide</a:t>
-            </a:r>
+              <a:t>Mapa </a:t>
+            </a:r>
+            <a:r>
+              <a:rPr sz="2400" b="1" i="0" dirty="0" err="1">
+                <a:solidFill>
+                  <a:srgbClr val="0F2137"/>
+                </a:solidFill>
+              </a:rPr>
+              <a:t>Completo</a:t>
+            </a:r>
+            <a:r>
+              <a:rPr sz="2400" b="1" i="0" dirty="0">
+                <a:solidFill>
+                  <a:srgbClr val="0F2137"/>
+                </a:solidFill>
+              </a:rPr>
+              <a:t> — 11 </a:t>
+            </a:r>
+            <a:r>
+              <a:rPr sz="2400" b="1" i="0" dirty="0" err="1">
+                <a:solidFill>
+                  <a:srgbClr val="0F2137"/>
+                </a:solidFill>
+              </a:rPr>
+              <a:t>Tipos</a:t>
+            </a:r>
+            <a:r>
+              <a:rPr lang="es-CL" sz="2400" b="1" i="0" dirty="0">
+                <a:solidFill>
+                  <a:srgbClr val="0F2137"/>
+                </a:solidFill>
+              </a:rPr>
+              <a:t> de Planes</a:t>
+            </a:r>
+            <a:r>
+              <a:rPr sz="2400" b="1" i="0" dirty="0">
+                <a:solidFill>
+                  <a:srgbClr val="0F2137"/>
+                </a:solidFill>
+              </a:rPr>
+              <a:t> </a:t>
+            </a:r>
+            <a:r>
+              <a:rPr sz="2400" b="1" i="0" dirty="0" err="1">
+                <a:solidFill>
+                  <a:srgbClr val="0F2137"/>
+                </a:solidFill>
+              </a:rPr>
+              <a:t>en</a:t>
+            </a:r>
+            <a:r>
+              <a:rPr sz="2400" b="1" i="0" dirty="0">
+                <a:solidFill>
+                  <a:srgbClr val="0F2137"/>
+                </a:solidFill>
+              </a:rPr>
+              <a:t> la </a:t>
+            </a:r>
+            <a:r>
+              <a:rPr sz="2400" b="1" i="0" dirty="0" err="1">
+                <a:solidFill>
+                  <a:srgbClr val="0F2137"/>
+                </a:solidFill>
+              </a:rPr>
+              <a:t>Pirámide</a:t>
+            </a:r>
+            <a:endParaRPr sz="2400" b="1" i="0" dirty="0">
+              <a:solidFill>
+                <a:srgbClr val="0F2137"/>
+              </a:solidFill>
+            </a:endParaRPr>
           </a:p>
         </p:txBody>
       </p:sp>
@@ -10476,7 +10574,7 @@
         </p:nvSpPr>
         <p:spPr>
           <a:xfrm>
-            <a:off x="5486400" y="1097280"/>
+            <a:off x="5472620" y="1024128"/>
             <a:ext cx="978408" cy="438912"/>
           </a:xfrm>
           <a:prstGeom prst="rect">
@@ -10492,7 +10590,7 @@
           <a:p>
             <a:pPr algn="l"/>
             <a:r>
-              <a:rPr sz="1200" b="1" i="0">
+              <a:rPr sz="1200" b="1" i="0" dirty="0">
                 <a:solidFill>
                   <a:srgbClr val="FFFFFF"/>
                 </a:solidFill>
@@ -11342,7 +11440,7 @@
           <a:p>
             <a:pPr algn="l"/>
             <a:r>
-              <a:rPr sz="1200" b="1" i="0">
+              <a:rPr sz="1200" b="1" i="0" dirty="0">
                 <a:solidFill>
                   <a:srgbClr val="0F2137"/>
                 </a:solidFill>
@@ -11422,7 +11520,7 @@
           <a:p>
             <a:pPr algn="l"/>
             <a:r>
-              <a:rPr sz="1200" b="1" i="0">
+              <a:rPr sz="1200" b="1" i="0" dirty="0">
                 <a:solidFill>
                   <a:srgbClr val="00875A"/>
                 </a:solidFill>
@@ -12833,7 +12931,7 @@
         <p:spPr>
           <a:xfrm>
             <a:off x="6547104" y="2843784"/>
-            <a:ext cx="1097280" cy="438912"/>
+            <a:ext cx="1170432" cy="276999"/>
           </a:xfrm>
           <a:prstGeom prst="rect">
             <a:avLst/>
@@ -12848,7 +12946,7 @@
           <a:p>
             <a:pPr algn="l"/>
             <a:r>
-              <a:rPr sz="1200" b="0" i="0">
+              <a:rPr sz="1200" b="0" i="0" dirty="0">
                 <a:solidFill>
                   <a:srgbClr val="3D5A73"/>
                 </a:solidFill>
@@ -13437,7 +13535,7 @@
         <p:spPr>
           <a:xfrm>
             <a:off x="7690104" y="3209544"/>
-            <a:ext cx="1417320" cy="438912"/>
+            <a:ext cx="1362330" cy="438912"/>
           </a:xfrm>
           <a:prstGeom prst="rect">
             <a:avLst/>
@@ -13702,7 +13800,7 @@
           <a:p>
             <a:pPr algn="l"/>
             <a:r>
-              <a:rPr sz="1200" b="1" i="0">
+              <a:rPr sz="1200" b="1" i="0" dirty="0">
                 <a:solidFill>
                   <a:srgbClr val="946200"/>
                 </a:solidFill>
@@ -14762,7 +14860,7 @@
           <a:p>
             <a:pPr algn="l"/>
             <a:r>
-              <a:rPr sz="1200" b="1" i="0">
+              <a:rPr sz="1200" b="1" i="0" dirty="0">
                 <a:solidFill>
                   <a:srgbClr val="0F2137"/>
                 </a:solidFill>
